--- a/Harms and Ethical Concerns.pptx
+++ b/Harms and Ethical Concerns.pptx
@@ -120,6 +120,11 @@
       </a:defRPr>
     </a:lvl9pPr>
   </p:defaultTextStyle>
+  <p:extLst>
+    <p:ext uri="{EFAFB233-063F-42B5-8137-9DF3F51BA10A}">
+      <p15:sldGuideLst xmlns:p15="http://schemas.microsoft.com/office/powerpoint/2012/main"/>
+    </p:ext>
+  </p:extLst>
 </p:presentation>
 </file>
 
@@ -272,7 +277,7 @@
           <a:p>
             <a:fld id="{C35E0199-61FE-4BB3-9BA2-7894E6127BF6}" type="datetimeFigureOut">
               <a:rPr lang="en-IN" smtClean="0"/>
-              <a:t>19-10-2025</a:t>
+              <a:t>30-05-2026</a:t>
             </a:fld>
             <a:endParaRPr lang="en-IN"/>
           </a:p>
@@ -472,7 +477,7 @@
           <a:p>
             <a:fld id="{C35E0199-61FE-4BB3-9BA2-7894E6127BF6}" type="datetimeFigureOut">
               <a:rPr lang="en-IN" smtClean="0"/>
-              <a:t>19-10-2025</a:t>
+              <a:t>30-05-2026</a:t>
             </a:fld>
             <a:endParaRPr lang="en-IN"/>
           </a:p>
@@ -682,7 +687,7 @@
           <a:p>
             <a:fld id="{C35E0199-61FE-4BB3-9BA2-7894E6127BF6}" type="datetimeFigureOut">
               <a:rPr lang="en-IN" smtClean="0"/>
-              <a:t>19-10-2025</a:t>
+              <a:t>30-05-2026</a:t>
             </a:fld>
             <a:endParaRPr lang="en-IN"/>
           </a:p>
@@ -882,7 +887,7 @@
           <a:p>
             <a:fld id="{C35E0199-61FE-4BB3-9BA2-7894E6127BF6}" type="datetimeFigureOut">
               <a:rPr lang="en-IN" smtClean="0"/>
-              <a:t>19-10-2025</a:t>
+              <a:t>30-05-2026</a:t>
             </a:fld>
             <a:endParaRPr lang="en-IN"/>
           </a:p>
@@ -1158,7 +1163,7 @@
           <a:p>
             <a:fld id="{C35E0199-61FE-4BB3-9BA2-7894E6127BF6}" type="datetimeFigureOut">
               <a:rPr lang="en-IN" smtClean="0"/>
-              <a:t>19-10-2025</a:t>
+              <a:t>30-05-2026</a:t>
             </a:fld>
             <a:endParaRPr lang="en-IN"/>
           </a:p>
@@ -1426,7 +1431,7 @@
           <a:p>
             <a:fld id="{C35E0199-61FE-4BB3-9BA2-7894E6127BF6}" type="datetimeFigureOut">
               <a:rPr lang="en-IN" smtClean="0"/>
-              <a:t>19-10-2025</a:t>
+              <a:t>30-05-2026</a:t>
             </a:fld>
             <a:endParaRPr lang="en-IN"/>
           </a:p>
@@ -1841,7 +1846,7 @@
           <a:p>
             <a:fld id="{C35E0199-61FE-4BB3-9BA2-7894E6127BF6}" type="datetimeFigureOut">
               <a:rPr lang="en-IN" smtClean="0"/>
-              <a:t>19-10-2025</a:t>
+              <a:t>30-05-2026</a:t>
             </a:fld>
             <a:endParaRPr lang="en-IN"/>
           </a:p>
@@ -1983,7 +1988,7 @@
           <a:p>
             <a:fld id="{C35E0199-61FE-4BB3-9BA2-7894E6127BF6}" type="datetimeFigureOut">
               <a:rPr lang="en-IN" smtClean="0"/>
-              <a:t>19-10-2025</a:t>
+              <a:t>30-05-2026</a:t>
             </a:fld>
             <a:endParaRPr lang="en-IN"/>
           </a:p>
@@ -2096,7 +2101,7 @@
           <a:p>
             <a:fld id="{C35E0199-61FE-4BB3-9BA2-7894E6127BF6}" type="datetimeFigureOut">
               <a:rPr lang="en-IN" smtClean="0"/>
-              <a:t>19-10-2025</a:t>
+              <a:t>30-05-2026</a:t>
             </a:fld>
             <a:endParaRPr lang="en-IN"/>
           </a:p>
@@ -2409,7 +2414,7 @@
           <a:p>
             <a:fld id="{C35E0199-61FE-4BB3-9BA2-7894E6127BF6}" type="datetimeFigureOut">
               <a:rPr lang="en-IN" smtClean="0"/>
-              <a:t>19-10-2025</a:t>
+              <a:t>30-05-2026</a:t>
             </a:fld>
             <a:endParaRPr lang="en-IN"/>
           </a:p>
@@ -2698,7 +2703,7 @@
           <a:p>
             <a:fld id="{C35E0199-61FE-4BB3-9BA2-7894E6127BF6}" type="datetimeFigureOut">
               <a:rPr lang="en-IN" smtClean="0"/>
-              <a:t>19-10-2025</a:t>
+              <a:t>30-05-2026</a:t>
             </a:fld>
             <a:endParaRPr lang="en-IN"/>
           </a:p>
@@ -2941,7 +2946,7 @@
           <a:p>
             <a:fld id="{C35E0199-61FE-4BB3-9BA2-7894E6127BF6}" type="datetimeFigureOut">
               <a:rPr lang="en-IN" smtClean="0"/>
-              <a:t>19-10-2025</a:t>
+              <a:t>30-05-2026</a:t>
             </a:fld>
             <a:endParaRPr lang="en-IN"/>
           </a:p>
@@ -3408,6 +3413,10 @@
           <a:bodyPr/>
           <a:lstStyle/>
           <a:p>
+            <a:r>
+              <a:rPr lang="en-IN"/>
+              <a:t>mohanraj</a:t>
+            </a:r>
             <a:endParaRPr lang="en-IN" dirty="0"/>
           </a:p>
         </p:txBody>
